--- a/media/resources/BirOrunduuOnduktar/Onduktar_BirdenAzBingo.pptx
+++ b/media/resources/BirOrunduuOnduktar/Onduktar_BirdenAzBingo.pptx
@@ -7254,7 +7254,7 @@
                 <a:ea typeface="+mn-ea"/>
                 <a:cs typeface="+mn-cs"/>
               </a:rPr>
-              <a:t>Окуучулар </a:t>
+              <a:t>Окуучулар тордон тогуз жоопту тандап, дептердеги 3х3 чакмакка каалагандай коюшат.</a:t>
             </a:r>
             <a:r>
               <a:rPr kumimoji="0" lang="ru-RU" sz="2400" b="0" i="0" u="none" strike="noStrike" kern="1200" cap="none" spc="0" normalizeH="0" baseline="0" noProof="0" dirty="0">
@@ -7271,7 +7271,7 @@
                 <a:ea typeface="+mn-ea"/>
                 <a:cs typeface="+mn-cs"/>
               </a:rPr>
-              <a:t>суроо</a:t>
+              <a:t/>
             </a:r>
             <a:r>
               <a:rPr kumimoji="0" lang="en-US" sz="2400" b="0" i="0" u="none" strike="noStrike" kern="1200" cap="none" spc="0" normalizeH="0" baseline="0" noProof="0" dirty="0">
@@ -7288,7 +7288,7 @@
                 <a:ea typeface="+mn-ea"/>
                 <a:cs typeface="+mn-cs"/>
               </a:rPr>
-              <a:t> </a:t>
+              <a:t/>
             </a:r>
             <a:r>
               <a:rPr kumimoji="0" lang="en-US" sz="2400" b="0" i="0" u="none" strike="noStrike" kern="1200" cap="none" spc="0" normalizeH="0" baseline="0" noProof="0" dirty="0" err="1">
@@ -7305,7 +7305,7 @@
                 <a:ea typeface="+mn-ea"/>
                 <a:cs typeface="+mn-cs"/>
               </a:rPr>
-              <a:t>тордон</a:t>
+              <a:t/>
             </a:r>
             <a:r>
               <a:rPr kumimoji="0" lang="en-US" sz="2400" b="0" i="0" u="none" strike="noStrike" kern="1200" cap="none" spc="0" normalizeH="0" baseline="0" noProof="0" dirty="0">
@@ -7322,7 +7322,7 @@
                 <a:ea typeface="+mn-ea"/>
                 <a:cs typeface="+mn-cs"/>
               </a:rPr>
-              <a:t> </a:t>
+              <a:t/>
             </a:r>
             <a:r>
               <a:rPr kumimoji="0" lang="en-US" sz="2000" b="0" i="0" u="none" strike="noStrike" kern="1200" cap="none" spc="0" normalizeH="0" baseline="0" noProof="0" dirty="0" err="1">
@@ -7339,7 +7339,7 @@
                 <a:ea typeface="+mn-ea"/>
                 <a:cs typeface="+mn-cs"/>
               </a:rPr>
-              <a:t>тогуз</a:t>
+              <a:t/>
             </a:r>
             <a:r>
               <a:rPr kumimoji="0" lang="en-US" sz="2000" b="0" i="0" u="none" strike="noStrike" kern="1200" cap="none" spc="0" normalizeH="0" baseline="0" noProof="0" dirty="0">
@@ -7356,7 +7356,7 @@
                 <a:ea typeface="+mn-ea"/>
                 <a:cs typeface="+mn-cs"/>
               </a:rPr>
-              <a:t> </a:t>
+              <a:t/>
             </a:r>
             <a:r>
               <a:rPr kumimoji="0" lang="en-US" sz="2000" b="0" i="0" u="none" strike="noStrike" kern="1200" cap="none" spc="0" normalizeH="0" baseline="0" noProof="0" dirty="0" err="1">
@@ -7373,7 +7373,7 @@
                 <a:ea typeface="+mn-ea"/>
                 <a:cs typeface="+mn-cs"/>
               </a:rPr>
-              <a:t>жоопту</a:t>
+              <a:t/>
             </a:r>
             <a:r>
               <a:rPr kumimoji="0" lang="en-US" sz="2000" b="0" i="0" u="none" strike="noStrike" kern="1200" cap="none" spc="0" normalizeH="0" baseline="0" noProof="0" dirty="0">
@@ -7390,7 +7390,7 @@
                 <a:ea typeface="+mn-ea"/>
                 <a:cs typeface="+mn-cs"/>
               </a:rPr>
-              <a:t> </a:t>
+              <a:t/>
             </a:r>
             <a:r>
               <a:rPr kumimoji="0" lang="en-US" sz="2000" b="0" i="0" u="none" strike="noStrike" kern="1200" cap="none" spc="0" normalizeH="0" baseline="0" noProof="0" dirty="0" err="1">
@@ -7407,7 +7407,7 @@
                 <a:ea typeface="+mn-ea"/>
                 <a:cs typeface="+mn-cs"/>
               </a:rPr>
-              <a:t>тандап</a:t>
+              <a:t/>
             </a:r>
             <a:r>
               <a:rPr kumimoji="0" lang="en-US" sz="2000" b="0" i="0" u="none" strike="noStrike" kern="1200" cap="none" spc="0" normalizeH="0" baseline="0" noProof="0" dirty="0">
@@ -7424,7 +7424,7 @@
                 <a:ea typeface="+mn-ea"/>
                 <a:cs typeface="+mn-cs"/>
               </a:rPr>
-              <a:t>, </a:t>
+              <a:t/>
             </a:r>
             <a:r>
               <a:rPr kumimoji="0" lang="en-US" sz="2000" b="0" i="0" u="none" strike="noStrike" kern="1200" cap="none" spc="0" normalizeH="0" baseline="0" noProof="0" dirty="0" err="1">
@@ -7441,7 +7441,7 @@
                 <a:ea typeface="+mn-ea"/>
                 <a:cs typeface="+mn-cs"/>
               </a:rPr>
-              <a:t>аларды</a:t>
+              <a:t/>
             </a:r>
             <a:r>
               <a:rPr kumimoji="0" lang="en-US" sz="2000" b="0" i="0" u="none" strike="noStrike" kern="1200" cap="none" spc="0" normalizeH="0" baseline="0" noProof="0" dirty="0">
@@ -7458,7 +7458,7 @@
                 <a:ea typeface="+mn-ea"/>
                 <a:cs typeface="+mn-cs"/>
               </a:rPr>
-              <a:t> </a:t>
+              <a:t/>
             </a:r>
             <a:r>
               <a:rPr kumimoji="0" lang="ru-RU" sz="2000" b="0" i="0" u="none" strike="noStrike" kern="1200" cap="none" spc="0" normalizeH="0" baseline="0" noProof="0" dirty="0">
@@ -7475,7 +7475,7 @@
                 <a:ea typeface="+mn-ea"/>
                 <a:cs typeface="+mn-cs"/>
               </a:rPr>
-              <a:t>дептериндеги</a:t>
+              <a:t/>
             </a:r>
             <a:r>
               <a:rPr kumimoji="0" lang="en-US" sz="2000" b="0" i="0" u="none" strike="noStrike" kern="1200" cap="none" spc="0" normalizeH="0" baseline="0" noProof="0" dirty="0">
@@ -7492,7 +7492,7 @@
                 <a:ea typeface="+mn-ea"/>
                 <a:cs typeface="+mn-cs"/>
               </a:rPr>
-              <a:t> 3х3 </a:t>
+              <a:t/>
             </a:r>
             <a:r>
               <a:rPr kumimoji="0" lang="en-US" sz="2000" b="0" i="0" u="none" strike="noStrike" kern="1200" cap="none" spc="0" normalizeH="0" baseline="0" noProof="0" dirty="0" err="1">
@@ -7509,7 +7509,7 @@
                 <a:ea typeface="+mn-ea"/>
                 <a:cs typeface="+mn-cs"/>
               </a:rPr>
-              <a:t>квадратка</a:t>
+              <a:t/>
             </a:r>
             <a:r>
               <a:rPr kumimoji="0" lang="en-US" sz="2000" b="0" i="0" u="none" strike="noStrike" kern="1200" cap="none" spc="0" normalizeH="0" baseline="0" noProof="0" dirty="0">
@@ -7526,7 +7526,7 @@
                 <a:ea typeface="+mn-ea"/>
                 <a:cs typeface="+mn-cs"/>
               </a:rPr>
-              <a:t> </a:t>
+              <a:t/>
             </a:r>
             <a:r>
               <a:rPr kumimoji="0" lang="en-US" sz="2000" b="0" i="0" u="none" strike="noStrike" kern="1200" cap="none" spc="0" normalizeH="0" baseline="0" noProof="0" dirty="0" err="1">
@@ -7543,7 +7543,7 @@
                 <a:ea typeface="+mn-ea"/>
                 <a:cs typeface="+mn-cs"/>
               </a:rPr>
-              <a:t>туш</a:t>
+              <a:t/>
             </a:r>
             <a:r>
               <a:rPr kumimoji="0" lang="en-US" sz="2000" b="0" i="0" u="none" strike="noStrike" kern="1200" cap="none" spc="0" normalizeH="0" baseline="0" noProof="0" dirty="0">
@@ -7560,7 +7560,7 @@
                 <a:ea typeface="+mn-ea"/>
                 <a:cs typeface="+mn-cs"/>
               </a:rPr>
-              <a:t> </a:t>
+              <a:t/>
             </a:r>
             <a:r>
               <a:rPr kumimoji="0" lang="en-US" sz="2000" b="0" i="0" u="none" strike="noStrike" kern="1200" cap="none" spc="0" normalizeH="0" baseline="0" noProof="0" dirty="0" err="1">
@@ -7577,7 +7577,7 @@
                 <a:ea typeface="+mn-ea"/>
                 <a:cs typeface="+mn-cs"/>
               </a:rPr>
-              <a:t>келди</a:t>
+              <a:t/>
             </a:r>
             <a:r>
               <a:rPr kumimoji="0" lang="en-US" sz="2000" b="0" i="0" u="none" strike="noStrike" kern="1200" cap="none" spc="0" normalizeH="0" baseline="0" noProof="0" dirty="0">
@@ -7594,7 +7594,7 @@
                 <a:ea typeface="+mn-ea"/>
                 <a:cs typeface="+mn-cs"/>
               </a:rPr>
-              <a:t> </a:t>
+              <a:t/>
             </a:r>
             <a:r>
               <a:rPr kumimoji="0" lang="en-US" sz="2000" b="0" i="0" u="none" strike="noStrike" kern="1200" cap="none" spc="0" normalizeH="0" baseline="0" noProof="0" dirty="0" err="1">
@@ -7611,7 +7611,7 @@
                 <a:ea typeface="+mn-ea"/>
                 <a:cs typeface="+mn-cs"/>
               </a:rPr>
-              <a:t>жайгаштырышы</a:t>
+              <a:t/>
             </a:r>
             <a:r>
               <a:rPr kumimoji="0" lang="en-US" sz="2000" b="0" i="0" u="none" strike="noStrike" kern="1200" cap="none" spc="0" normalizeH="0" baseline="0" noProof="0" dirty="0">
@@ -7628,7 +7628,7 @@
                 <a:ea typeface="+mn-ea"/>
                 <a:cs typeface="+mn-cs"/>
               </a:rPr>
-              <a:t> </a:t>
+              <a:t/>
             </a:r>
             <a:r>
               <a:rPr kumimoji="0" lang="en-US" sz="2000" b="0" i="0" u="none" strike="noStrike" kern="1200" cap="none" spc="0" normalizeH="0" baseline="0" noProof="0" dirty="0" err="1">
@@ -7645,7 +7645,7 @@
                 <a:ea typeface="+mn-ea"/>
                 <a:cs typeface="+mn-cs"/>
               </a:rPr>
-              <a:t>керек</a:t>
+              <a:t/>
             </a:r>
             <a:r>
               <a:rPr kumimoji="0" lang="en-US" sz="2000" b="0" i="0" u="none" strike="noStrike" kern="1200" cap="none" spc="0" normalizeH="0" baseline="0" noProof="0" dirty="0">
@@ -7662,7 +7662,7 @@
                 <a:ea typeface="+mn-ea"/>
                 <a:cs typeface="+mn-cs"/>
               </a:rPr>
-              <a:t>.</a:t>
+              <a:t/>
             </a:r>
           </a:p>
           <a:p>
@@ -8979,7 +8979,7 @@
             <a:pPr algn="ctr"/>
             <a:r>
               <a:rPr lang="en-GB" sz="9600" dirty="0"/>
-              <a:t>18 ÷ 0.6</a:t>
+              <a:t>18 ÷ 0,6</a:t>
             </a:r>
           </a:p>
         </p:txBody>
@@ -9308,7 +9308,7 @@
             <a:pPr algn="ctr"/>
             <a:r>
               <a:rPr lang="en-GB" sz="9600" dirty="0"/>
-              <a:t>12 ÷ 0.8</a:t>
+              <a:t>12 ÷ 0,8</a:t>
             </a:r>
           </a:p>
         </p:txBody>
@@ -9637,7 +9637,7 @@
             <a:pPr algn="ctr"/>
             <a:r>
               <a:rPr lang="en-GB" sz="9600" dirty="0"/>
-              <a:t>24 ÷ 0.4</a:t>
+              <a:t>24 ÷ 0,4</a:t>
             </a:r>
           </a:p>
         </p:txBody>
@@ -9966,7 +9966,7 @@
             <a:pPr algn="ctr"/>
             <a:r>
               <a:rPr lang="en-GB" sz="9600" dirty="0"/>
-              <a:t>7 ÷ 0.2</a:t>
+              <a:t>7 ÷ 0,2</a:t>
             </a:r>
           </a:p>
         </p:txBody>
@@ -10295,7 +10295,7 @@
             <a:pPr algn="ctr"/>
             <a:r>
               <a:rPr lang="en-GB" sz="9600" dirty="0"/>
-              <a:t>24 ÷ 0.5</a:t>
+              <a:t>24 ÷ 0,5</a:t>
             </a:r>
           </a:p>
         </p:txBody>
@@ -10624,7 +10624,7 @@
             <a:pPr algn="ctr"/>
             <a:r>
               <a:rPr lang="en-GB" sz="9600" dirty="0"/>
-              <a:t>15 ÷ 0.2</a:t>
+              <a:t>15 ÷ 0,2</a:t>
             </a:r>
           </a:p>
         </p:txBody>
@@ -10953,7 +10953,7 @@
             <a:pPr algn="ctr"/>
             <a:r>
               <a:rPr lang="en-GB" sz="9600" dirty="0"/>
-              <a:t>4 ÷ 0.4</a:t>
+              <a:t>4 ÷ 0,4</a:t>
             </a:r>
           </a:p>
         </p:txBody>
@@ -11282,7 +11282,7 @@
             <a:pPr algn="ctr"/>
             <a:r>
               <a:rPr lang="en-GB" sz="9600" dirty="0"/>
-              <a:t>4 ÷ 0.2</a:t>
+              <a:t>4 ÷ 0,2</a:t>
             </a:r>
           </a:p>
         </p:txBody>
@@ -11611,7 +11611,7 @@
             <a:pPr algn="ctr"/>
             <a:r>
               <a:rPr lang="en-GB" sz="9600" dirty="0"/>
-              <a:t>3 ÷ 0.6</a:t>
+              <a:t>3 ÷ 0,6</a:t>
             </a:r>
           </a:p>
         </p:txBody>
@@ -11940,7 +11940,7 @@
             <a:pPr algn="ctr"/>
             <a:r>
               <a:rPr lang="en-GB" sz="9600" dirty="0"/>
-              <a:t>31 ÷ 0.5</a:t>
+              <a:t>31 ÷ 0,5</a:t>
             </a:r>
           </a:p>
         </p:txBody>
@@ -24379,7 +24379,7 @@
             <a:pPr algn="ctr"/>
             <a:r>
               <a:rPr lang="en-GB" sz="9600" dirty="0"/>
-              <a:t>40 ÷ 0.8</a:t>
+              <a:t>40 ÷ 0,8</a:t>
             </a:r>
           </a:p>
         </p:txBody>
@@ -24708,7 +24708,7 @@
             <a:pPr algn="ctr"/>
             <a:r>
               <a:rPr lang="en-GB" sz="9600" dirty="0"/>
-              <a:t>16 ÷ 0.4</a:t>
+              <a:t>16 ÷ 0,4</a:t>
             </a:r>
           </a:p>
         </p:txBody>
@@ -25037,7 +25037,7 @@
             <a:pPr algn="ctr"/>
             <a:r>
               <a:rPr lang="en-GB" sz="9600" dirty="0"/>
-              <a:t>24 ÷ 0.3</a:t>
+              <a:t>24 ÷ 0,3</a:t>
             </a:r>
           </a:p>
         </p:txBody>
@@ -25366,7 +25366,7 @@
             <a:pPr algn="ctr"/>
             <a:r>
               <a:rPr lang="en-GB" sz="9600" dirty="0"/>
-              <a:t>45 ÷ 0.3</a:t>
+              <a:t>45 ÷ 0,3</a:t>
             </a:r>
           </a:p>
         </p:txBody>
@@ -25695,7 +25695,7 @@
             <a:pPr algn="ctr"/>
             <a:r>
               <a:rPr lang="en-GB" sz="9600" dirty="0"/>
-              <a:t>20 ÷ 0.8</a:t>
+              <a:t>20 ÷ 0,8</a:t>
             </a:r>
           </a:p>
         </p:txBody>
@@ -26024,7 +26024,7 @@
             <a:pPr algn="ctr"/>
             <a:r>
               <a:rPr lang="en-GB" sz="9600" dirty="0"/>
-              <a:t>60 ÷ 0.3</a:t>
+              <a:t>60 ÷ 0,3</a:t>
             </a:r>
           </a:p>
         </p:txBody>
